--- a/docs/slides/nankai/nankai_restoration_workforce_2026-09-14.pptx
+++ b/docs/slides/nankai/nankai_restoration_workforce_2026-09-14.pptx
@@ -505,7 +505,7 @@
           <a:lstStyle/>
           <a:p>
             <a:r>
-              <a:t>左は営業所(円の大きさが人員、色が残っている電柱修理の割合)と他社応援の車列。右上は働いている人の内訳、右中は会社別の残っている折れた電柱、右下は停電中の需要家を応援の条件で比べたもの。折れた電柱は揺れ 4,288 本、建物の全壊に巻き込まれ 62,566 本、津波 83,381 本。7 日後に働く人は 25,103 人で、地元 16,599 人、社内融通 7,728 人、他社応援 776 人。停電中は 724 万軒で、送電側が 465 万軒、配電が 101 万軒。</a:t>
+              <a:t>左は営業所(円の大きさが人員、色が残っている電柱修理の割合)と他社応援の車列。右上は働いている人の内訳、右中は会社別の残っている折れた電柱、右下は停電中の需要家を応援の条件で比べたもの。折れた電柱は揺れ 3,977 本、建物の全壊に巻き込まれ 60,785 本、津波 78,449 本。7 日後に働く人は 33,283 人で、地元 21,057 人、社内融通 10,570 人、他社応援 1,656 人。停電中は 715 万軒で、送電側が 463 万軒、配電が 90 万軒。</a:t>
             </a:r>
           </a:p>
           <a:p/>
@@ -581,7 +581,7 @@
           <a:lstStyle/>
           <a:p>
             <a:r>
-              <a:t>応援の送り手は災害時連携計画(送配電網協議会)のプッシュ型応援の前提条件「応援事業者の供給区域において設備被害がないまたは、被害予想がされない場合」に合わせ、自社の被害度 r(残作業 / 動員可能数の 7 日分)が 0.25 未満の会社に限った。建物全壊を入れると東京の r が 0.21 から 0.29 に上がり、送り手から外れる。応援の合計は 1,089 人から 776 人に減る。</a:t>
+              <a:t>応援の送り手は災害時連携計画(送配電網協議会)のプッシュ型応援の前提条件「応援事業者の供給区域において設備被害がないまたは、被害予想がされない場合」に合わせ、自社の被害度 r(残作業 / 動員可能数の 7 日分)が 0.25 未満の会社に限った。東京は電柱が需要家あたり 0.19 本と少なく r = 0.17 で送り手になる。前の版(一律 0.25 本・300 人/百万口)では r = 0.29 で外れ、応援は 776 人だった。送り手の判定は仮定の置き方で入れ替わるので、応援の人数は幅で読む。</a:t>
             </a:r>
           </a:p>
           <a:p/>
@@ -657,7 +657,7 @@
           <a:lstStyle/>
           <a:p>
             <a:r>
-              <a:t>応援 30% にしても 14 日後は 3 万軒で、既定の 7 万軒と大差ない。浸水域の電柱 8.3 万本は水が引いて道路が開く 10 日後まで着手できず、そこで復旧の速さが決まる。応援の人数より、着手できる時期と社内の人の回し方が効く。</a:t>
+              <a:t>応援 30% にしても 14 日後は 0 万軒で、既定の 1 万軒と大差ない。浸水域の電柱 7.8 万本は水が引いて道路が開く 10 日後まで着手できず、そこで復旧の速さが決まる。応援の人数より、着手できる時期と社内の人の回し方が効く。</a:t>
             </a:r>
           </a:p>
           <a:p/>
@@ -733,7 +733,7 @@
           <a:lstStyle/>
           <a:p>
             <a:r>
-              <a:t>送電側の停電(7 日後 465 万軒)は動的カスケードの母線平均で、津波で浸水した変電所と上流の孤立が長く残る。内閣府 2025 より 4 日以降が 1 桁多い既知の問題(負の結果として記録済み)で、人員モデルでは直らない。</a:t>
+              <a:t>送電側の停電(7 日後 463 万軒)は動的カスケードの母線平均で、津波で浸水した変電所と上流の孤立が長く残る。内閣府 2025 より 4 日以降が 1 桁多い既知の問題(負の結果として記録済み)で、人員モデルでは直らない。</a:t>
             </a:r>
           </a:p>
           <a:p/>
@@ -4610,7 +4610,7 @@
                 <a:ea typeface="Hiragino Sans"/>
                 <a:cs typeface="Hiragino Sans"/>
               </a:rPr>
-              <a:t>出典｜make_restoration_workforce.py / run_v4_red(動的カスケード・縮約網)/ 令和5年住宅・土地統計調査 第6-3表 / 内閣府 首都直下 手法 資料3</a:t>
+              <a:t>出典｜make_restoration_workforce.py / run_v6(動的カスケード)/ 令和5年住宅・土地統計調査 第6-3表 / 内閣府 首都直下 手法 資料3 / 各社 有価証券報告書 FY2025</a:t>
             </a:r>
           </a:p>
         </p:txBody>
@@ -4783,7 +4783,7 @@
                 <a:ea typeface="Hiragino Sans"/>
                 <a:cs typeface="Hiragino Sans"/>
               </a:rPr>
-              <a:t> を足す。木造全壊率は市区町村の建築年次の構成と全壊率曲線から。浸水域は 16.3%。</a:t>
+              <a:t> を足す。木造全壊率は市区町村の建築年次と全壊率曲線から。浸水域は 16.3%。電柱の本数は各社の支持物数から。</a:t>
             </a:r>
           </a:p>
         </p:txBody>
@@ -4904,7 +4904,7 @@
                 <a:ea typeface="Hiragino Sans"/>
                 <a:cs typeface="Hiragino Sans"/>
               </a:rPr>
-              <a:t>211 営業所に 25,230 人(需要家 100 万口あたり 300 人・台風15号と能登の実績)。震度と浸水で欠け、1 日で揃う。被害の小さい営業所から半数を重い営業所へ回す。</a:t>
+              <a:t>211 営業所に 32,799 人(100 万口あたり 390 人・熊本や台風の実績の中央値)。震度と浸水で欠け、1 日で揃う。軽い営業所から半数を重い営業所へ回す。</a:t>
             </a:r>
           </a:p>
         </p:txBody>
@@ -5025,7 +5025,7 @@
                 <a:ea typeface="Hiragino Sans"/>
                 <a:cs typeface="Hiragino Sans"/>
               </a:rPr>
-              <a:t>自社の被害が小さい北海道・東北・北陸・九州が動員可能数の 15% を送る。本店から陸路で、北海道は海路で 1 日足す。第 1 陣は 1.5〜1.75 日で着く。</a:t>
+              <a:t>自社の被害が小さい北海道・東北・北陸・九州・東京が動員可能数の 15% を送る。本店から陸路で、北海道は海路で 1 日足す。第 1 陣は 1.5〜1.75 日で着く。</a:t>
             </a:r>
           </a:p>
         </p:txBody>
@@ -5148,8 +5148,8 @@
           <p:nvPr/>
         </p:nvGraphicFramePr>
         <p:xfrm>
-          <a:off x="1510259" y="1565402"/>
-          <a:ext cx="9171176" cy="4330700"/>
+          <a:off x="1567689" y="1353312"/>
+          <a:ext cx="9056317" cy="4775200"/>
         </p:xfrm>
         <a:graphic>
           <a:graphicData uri="http://schemas.openxmlformats.org/drawingml/2006/table">
@@ -5159,7 +5159,7 @@
                 <a:gridCol w="2565400"/>
                 <a:gridCol w="2032000"/>
                 <a:gridCol w="1702358"/>
-                <a:gridCol w="998626"/>
+                <a:gridCol w="883767"/>
                 <a:gridCol w="883767"/>
                 <a:gridCol w="989025"/>
               </a:tblGrid>
@@ -5427,7 +5427,7 @@
                           <a:ea typeface="Hiragino Sans"/>
                           <a:cs typeface="Hiragino Sans"/>
                         </a:rPr>
-                        <a:t>建物全壊を入れない(前の版)</a:t>
+                        <a:t>建物全壊を入れない</a:t>
                       </a:r>
                     </a:p>
                   </a:txBody>
@@ -5503,7 +5503,7 @@
                           <a:ea typeface="Hiragino Sans"/>
                           <a:cs typeface="Hiragino Sans"/>
                         </a:rPr>
-                        <a:t>94 万軒</a:t>
+                        <a:t>88 万軒</a:t>
                       </a:r>
                     </a:p>
                   </a:txBody>
@@ -5541,7 +5541,7 @@
                           <a:ea typeface="Hiragino Sans"/>
                           <a:cs typeface="Hiragino Sans"/>
                         </a:rPr>
-                        <a:t>92 万軒</a:t>
+                        <a:t>86 万軒</a:t>
                       </a:r>
                     </a:p>
                   </a:txBody>
@@ -5579,7 +5579,7 @@
                           <a:ea typeface="Hiragino Sans"/>
                           <a:cs typeface="Hiragino Sans"/>
                         </a:rPr>
-                        <a:t>6 万軒</a:t>
+                        <a:t>2 万軒</a:t>
                       </a:r>
                     </a:p>
                   </a:txBody>
@@ -5617,7 +5617,7 @@
                           <a:ea typeface="Hiragino Sans"/>
                           <a:cs typeface="Hiragino Sans"/>
                         </a:rPr>
-                        <a:t>1,089 人</a:t>
+                        <a:t>2,085 人</a:t>
                       </a:r>
                     </a:p>
                   </a:txBody>
@@ -5695,7 +5695,7 @@
                           <a:ea typeface="Hiragino Sans"/>
                           <a:cs typeface="Hiragino Sans"/>
                         </a:rPr>
-                        <a:t>62,566 本</a:t>
+                        <a:t>60,785 本</a:t>
                       </a:r>
                     </a:p>
                   </a:txBody>
@@ -5733,7 +5733,7 @@
                           <a:ea typeface="Hiragino Sans"/>
                           <a:cs typeface="Hiragino Sans"/>
                         </a:rPr>
-                        <a:t>161 万軒</a:t>
+                        <a:t>153 万軒</a:t>
                       </a:r>
                     </a:p>
                   </a:txBody>
@@ -5771,7 +5771,7 @@
                           <a:ea typeface="Hiragino Sans"/>
                           <a:cs typeface="Hiragino Sans"/>
                         </a:rPr>
-                        <a:t>101 万軒</a:t>
+                        <a:t>90 万軒</a:t>
                       </a:r>
                     </a:p>
                   </a:txBody>
@@ -5809,7 +5809,7 @@
                           <a:ea typeface="Hiragino Sans"/>
                           <a:cs typeface="Hiragino Sans"/>
                         </a:rPr>
-                        <a:t>7 万軒</a:t>
+                        <a:t>1 万軒</a:t>
                       </a:r>
                     </a:p>
                   </a:txBody>
@@ -5847,7 +5847,7 @@
                           <a:ea typeface="Hiragino Sans"/>
                           <a:cs typeface="Hiragino Sans"/>
                         </a:rPr>
-                        <a:t>776 人</a:t>
+                        <a:t>1,656 人</a:t>
                       </a:r>
                     </a:p>
                   </a:txBody>
@@ -5871,7 +5871,7 @@
                   </a:tcPr>
                 </a:tc>
               </a:tr>
-              <a:tr h="374650">
+              <a:tr h="596900">
                 <a:tc>
                   <a:txBody>
                     <a:bodyPr/>
@@ -5925,7 +5925,7 @@
                           <a:ea typeface="Hiragino Sans"/>
                           <a:cs typeface="Hiragino Sans"/>
                         </a:rPr>
-                        <a:t>43,491 本</a:t>
+                        <a:t>42,928 本</a:t>
                       </a:r>
                     </a:p>
                   </a:txBody>
@@ -5963,7 +5963,7 @@
                           <a:ea typeface="Hiragino Sans"/>
                           <a:cs typeface="Hiragino Sans"/>
                         </a:rPr>
-                        <a:t>141 万軒</a:t>
+                        <a:t>134 万軒</a:t>
                       </a:r>
                     </a:p>
                   </a:txBody>
@@ -6001,7 +6001,7 @@
                           <a:ea typeface="Hiragino Sans"/>
                           <a:cs typeface="Hiragino Sans"/>
                         </a:rPr>
-                        <a:t>97 万軒</a:t>
+                        <a:t>88 万軒</a:t>
                       </a:r>
                     </a:p>
                   </a:txBody>
@@ -6039,7 +6039,7 @@
                           <a:ea typeface="Hiragino Sans"/>
                           <a:cs typeface="Hiragino Sans"/>
                         </a:rPr>
-                        <a:t>7 万軒</a:t>
+                        <a:t>1 万軒</a:t>
                       </a:r>
                     </a:p>
                   </a:txBody>
@@ -6077,7 +6077,7 @@
                           <a:ea typeface="Hiragino Sans"/>
                           <a:cs typeface="Hiragino Sans"/>
                         </a:rPr>
-                        <a:t>821 人</a:t>
+                        <a:t>1,821 人</a:t>
                       </a:r>
                     </a:p>
                   </a:txBody>
@@ -6155,7 +6155,7 @@
                           <a:ea typeface="Hiragino Sans"/>
                           <a:cs typeface="Hiragino Sans"/>
                         </a:rPr>
-                        <a:t>111,602 本</a:t>
+                        <a:t>105,696 本</a:t>
                       </a:r>
                     </a:p>
                   </a:txBody>
@@ -6193,7 +6193,7 @@
                           <a:ea typeface="Hiragino Sans"/>
                           <a:cs typeface="Hiragino Sans"/>
                         </a:rPr>
-                        <a:t>214 万軒</a:t>
+                        <a:t>200 万軒</a:t>
                       </a:r>
                     </a:p>
                   </a:txBody>
@@ -6231,7 +6231,7 @@
                           <a:ea typeface="Hiragino Sans"/>
                           <a:cs typeface="Hiragino Sans"/>
                         </a:rPr>
-                        <a:t>112 万軒</a:t>
+                        <a:t>98 万軒</a:t>
                       </a:r>
                     </a:p>
                   </a:txBody>
@@ -6269,7 +6269,7 @@
                           <a:ea typeface="Hiragino Sans"/>
                           <a:cs typeface="Hiragino Sans"/>
                         </a:rPr>
-                        <a:t>10 万軒</a:t>
+                        <a:t>3 万軒</a:t>
                       </a:r>
                     </a:p>
                   </a:txBody>
@@ -6307,7 +6307,7 @@
                           <a:ea typeface="Hiragino Sans"/>
                           <a:cs typeface="Hiragino Sans"/>
                         </a:rPr>
-                        <a:t>618 人</a:t>
+                        <a:t>950 人</a:t>
                       </a:r>
                     </a:p>
                   </a:txBody>
@@ -6331,7 +6331,7 @@
                   </a:tcPr>
                 </a:tc>
               </a:tr>
-              <a:tr h="374650">
+              <a:tr h="596900">
                 <a:tc>
                   <a:txBody>
                     <a:bodyPr/>
@@ -6385,7 +6385,7 @@
                           <a:ea typeface="Hiragino Sans"/>
                           <a:cs typeface="Hiragino Sans"/>
                         </a:rPr>
-                        <a:t>37,821 本</a:t>
+                        <a:t>37,202 本</a:t>
                       </a:r>
                     </a:p>
                   </a:txBody>
@@ -6423,7 +6423,7 @@
                           <a:ea typeface="Hiragino Sans"/>
                           <a:cs typeface="Hiragino Sans"/>
                         </a:rPr>
-                        <a:t>135 万軒</a:t>
+                        <a:t>128 万軒</a:t>
                       </a:r>
                     </a:p>
                   </a:txBody>
@@ -6461,7 +6461,7 @@
                           <a:ea typeface="Hiragino Sans"/>
                           <a:cs typeface="Hiragino Sans"/>
                         </a:rPr>
-                        <a:t>94 万軒</a:t>
+                        <a:t>87 万軒</a:t>
                       </a:r>
                     </a:p>
                   </a:txBody>
@@ -6499,7 +6499,7 @@
                           <a:ea typeface="Hiragino Sans"/>
                           <a:cs typeface="Hiragino Sans"/>
                         </a:rPr>
-                        <a:t>7 万軒</a:t>
+                        <a:t>1 万軒</a:t>
                       </a:r>
                     </a:p>
                   </a:txBody>
@@ -6537,7 +6537,7 @@
                           <a:ea typeface="Hiragino Sans"/>
                           <a:cs typeface="Hiragino Sans"/>
                         </a:rPr>
-                        <a:t>811 人</a:t>
+                        <a:t>1,824 人</a:t>
                       </a:r>
                     </a:p>
                   </a:txBody>
@@ -6615,7 +6615,7 @@
                           <a:ea typeface="Hiragino Sans"/>
                           <a:cs typeface="Hiragino Sans"/>
                         </a:rPr>
-                        <a:t>62,566 本</a:t>
+                        <a:t>60,785 本</a:t>
                       </a:r>
                     </a:p>
                   </a:txBody>
@@ -6653,7 +6653,7 @@
                           <a:ea typeface="Hiragino Sans"/>
                           <a:cs typeface="Hiragino Sans"/>
                         </a:rPr>
-                        <a:t>161 万軒</a:t>
+                        <a:t>153 万軒</a:t>
                       </a:r>
                     </a:p>
                   </a:txBody>
@@ -6691,7 +6691,7 @@
                           <a:ea typeface="Hiragino Sans"/>
                           <a:cs typeface="Hiragino Sans"/>
                         </a:rPr>
-                        <a:t>102 万軒</a:t>
+                        <a:t>93 万軒</a:t>
                       </a:r>
                     </a:p>
                   </a:txBody>
@@ -6729,7 +6729,7 @@
                           <a:ea typeface="Hiragino Sans"/>
                           <a:cs typeface="Hiragino Sans"/>
                         </a:rPr>
-                        <a:t>13 万軒</a:t>
+                        <a:t>6 万軒</a:t>
                       </a:r>
                     </a:p>
                   </a:txBody>
@@ -6845,7 +6845,7 @@
                           <a:ea typeface="Hiragino Sans"/>
                           <a:cs typeface="Hiragino Sans"/>
                         </a:rPr>
-                        <a:t>62,566 本</a:t>
+                        <a:t>60,785 本</a:t>
                       </a:r>
                     </a:p>
                   </a:txBody>
@@ -6883,7 +6883,7 @@
                           <a:ea typeface="Hiragino Sans"/>
                           <a:cs typeface="Hiragino Sans"/>
                         </a:rPr>
-                        <a:t>161 万軒</a:t>
+                        <a:t>153 万軒</a:t>
                       </a:r>
                     </a:p>
                   </a:txBody>
@@ -6921,7 +6921,7 @@
                           <a:ea typeface="Hiragino Sans"/>
                           <a:cs typeface="Hiragino Sans"/>
                         </a:rPr>
-                        <a:t>106 万軒</a:t>
+                        <a:t>92 万軒</a:t>
                       </a:r>
                     </a:p>
                   </a:txBody>
@@ -6962,7 +6962,7 @@
                           <a:ea typeface="Hiragino Sans"/>
                           <a:cs typeface="Hiragino Sans"/>
                         </a:rPr>
-                        <a:t>47 万軒</a:t>
+                        <a:t>25 万軒</a:t>
                       </a:r>
                     </a:p>
                   </a:txBody>
@@ -7000,7 +7000,7 @@
                           <a:ea typeface="Hiragino Sans"/>
                           <a:cs typeface="Hiragino Sans"/>
                         </a:rPr>
-                        <a:t>776 人</a:t>
+                        <a:t>1,656 人</a:t>
                       </a:r>
                     </a:p>
                   </a:txBody>
@@ -7379,7 +7379,7 @@
                 <a:ea typeface="Hiragino Sans"/>
                 <a:cs typeface="Hiragino Sans"/>
               </a:rPr>
-              <a:t>✓  曲線の幅を振っても 141〜214 万軒に収まる</a:t>
+              <a:t>✓  曲線の幅を振っても 134〜200 万軒に収まる</a:t>
             </a:r>
           </a:p>
           <a:p>
@@ -7415,7 +7415,7 @@
                 <a:ea typeface="Hiragino Sans"/>
                 <a:cs typeface="Hiragino Sans"/>
               </a:rPr>
-              <a:t>✓  社内の融通を止めると 14 日後が 7 倍に残る</a:t>
+              <a:t>✓  社内の融通を止めると 14 日後に 25 万軒残る</a:t>
             </a:r>
           </a:p>
         </p:txBody>
@@ -7600,7 +7600,7 @@
                 <a:ea typeface="Hiragino Sans"/>
                 <a:cs typeface="Hiragino Sans"/>
               </a:rPr>
-              <a:t>✗  応援 15% は台風15号の比率で、計画値ではない</a:t>
+              <a:t>✗  応援 15% は実績の比率で、計画値ではない</a:t>
             </a:r>
           </a:p>
           <a:p>
@@ -7618,7 +7618,7 @@
                 <a:ea typeface="Hiragino Sans"/>
                 <a:cs typeface="Hiragino Sans"/>
               </a:rPr>
-              <a:t>✗  7 日後の停電の 6 割は送電側で、別の課題</a:t>
+              <a:t>✗  7 日後の停電の 6 割強は送電側で、別の課題</a:t>
             </a:r>
           </a:p>
         </p:txBody>

--- a/docs/slides/nankai/nankai_restoration_workforce_2026-09-14.pptx
+++ b/docs/slides/nankai/nankai_restoration_workforce_2026-09-14.pptx
@@ -505,7 +505,7 @@
           <a:lstStyle/>
           <a:p>
             <a:r>
-              <a:t>左は営業所(円の大きさが人員、色が残っている電柱修理の割合)と他社応援の車列。右上は働いている人の内訳、右中は会社別の残っている折れた電柱、右下は停電中の需要家を応援の条件で比べたもの。折れた電柱は揺れ 3,977 本、建物の全壊に巻き込まれ 60,785 本、津波 78,449 本。7 日後に働く人は 33,283 人で、地元 21,057 人、社内融通 10,570 人、他社応援 1,656 人。停電中は 715 万軒で、送電側が 463 万軒、配電が 90 万軒。</a:t>
+              <a:t>左は営業所(円の大きさが人員、色が残っている電柱修理の割合)と他社応援の車列。右上は働いている人の内訳、右中は会社別の残っている折れた電柱、右下は停電中の需要家を応援の条件で比べたもの。折れた電柱は揺れ 3,977 本、建物の全壊に巻き込まれ 60,785 本、津波 78,449 本。7 日後に働く人は 33,282 人で、地元 20,447 人、社内融通 11,179 人、他社応援 1,656 人。停電中は 716 万軒で、送電側が 463 万軒、配電が 91 万軒。営業所の円は各社が公表する事業所の位置。</a:t>
             </a:r>
           </a:p>
           <a:p/>
@@ -657,7 +657,7 @@
           <a:lstStyle/>
           <a:p>
             <a:r>
-              <a:t>応援 30% にしても 14 日後は 0 万軒で、既定の 1 万軒と大差ない。浸水域の電柱 7.8 万本は水が引いて道路が開く 10 日後まで着手できず、そこで復旧の速さが決まる。応援の人数より、着手できる時期と社内の人の回し方が効く。</a:t>
+              <a:t>応援 30% にしても 14 日後は 0 万軒で、既定の 2 万軒と大差ない。浸水域の電柱 7.8 万本は水が引いて道路が開く 10 日後まで着手できず、そこで復旧の速さが決まる。応援の人数より、着手できる時期と社内の人の回し方が効く。</a:t>
             </a:r>
           </a:p>
           <a:p/>
@@ -4904,7 +4904,7 @@
                 <a:ea typeface="Hiragino Sans"/>
                 <a:cs typeface="Hiragino Sans"/>
               </a:rPr>
-              <a:t>211 営業所に 32,799 人(100 万口あたり 390 人・熊本や台風の実績の中央値)。震度と浸水で欠け、1 日で揃う。軽い営業所から半数を重い営業所へ回す。</a:t>
+              <a:t>各社公表の 350 事業所に 32,799 人(100 万口あたり 390 人・熊本や台風の実績の中央値)。震度と浸水で欠け、1 日で揃う。軽い事業所から半数を重い事業所へ回す。</a:t>
             </a:r>
           </a:p>
         </p:txBody>
@@ -5148,8 +5148,8 @@
           <p:nvPr/>
         </p:nvGraphicFramePr>
         <p:xfrm>
-          <a:off x="1567689" y="1353312"/>
-          <a:ext cx="9056317" cy="4775200"/>
+          <a:off x="1510259" y="1454277"/>
+          <a:ext cx="9171176" cy="4552950"/>
         </p:xfrm>
         <a:graphic>
           <a:graphicData uri="http://schemas.openxmlformats.org/drawingml/2006/table">
@@ -5159,7 +5159,7 @@
                 <a:gridCol w="2565400"/>
                 <a:gridCol w="2032000"/>
                 <a:gridCol w="1702358"/>
-                <a:gridCol w="883767"/>
+                <a:gridCol w="998626"/>
                 <a:gridCol w="883767"/>
                 <a:gridCol w="989025"/>
               </a:tblGrid>
@@ -5771,7 +5771,7 @@
                           <a:ea typeface="Hiragino Sans"/>
                           <a:cs typeface="Hiragino Sans"/>
                         </a:rPr>
-                        <a:t>90 万軒</a:t>
+                        <a:t>91 万軒</a:t>
                       </a:r>
                     </a:p>
                   </a:txBody>
@@ -5809,7 +5809,7 @@
                           <a:ea typeface="Hiragino Sans"/>
                           <a:cs typeface="Hiragino Sans"/>
                         </a:rPr>
-                        <a:t>1 万軒</a:t>
+                        <a:t>2 万軒</a:t>
                       </a:r>
                     </a:p>
                   </a:txBody>
@@ -6001,7 +6001,7 @@
                           <a:ea typeface="Hiragino Sans"/>
                           <a:cs typeface="Hiragino Sans"/>
                         </a:rPr>
-                        <a:t>88 万軒</a:t>
+                        <a:t>89 万軒</a:t>
                       </a:r>
                     </a:p>
                   </a:txBody>
@@ -6039,7 +6039,7 @@
                           <a:ea typeface="Hiragino Sans"/>
                           <a:cs typeface="Hiragino Sans"/>
                         </a:rPr>
-                        <a:t>1 万軒</a:t>
+                        <a:t>2 万軒</a:t>
                       </a:r>
                     </a:p>
                   </a:txBody>
@@ -6231,7 +6231,7 @@
                           <a:ea typeface="Hiragino Sans"/>
                           <a:cs typeface="Hiragino Sans"/>
                         </a:rPr>
-                        <a:t>98 万軒</a:t>
+                        <a:t>101 万軒</a:t>
                       </a:r>
                     </a:p>
                   </a:txBody>
@@ -6269,7 +6269,7 @@
                           <a:ea typeface="Hiragino Sans"/>
                           <a:cs typeface="Hiragino Sans"/>
                         </a:rPr>
-                        <a:t>3 万軒</a:t>
+                        <a:t>5 万軒</a:t>
                       </a:r>
                     </a:p>
                   </a:txBody>
@@ -6561,7 +6561,7 @@
                   </a:tcPr>
                 </a:tc>
               </a:tr>
-              <a:tr h="596900">
+              <a:tr h="374650">
                 <a:tc>
                   <a:txBody>
                     <a:bodyPr/>
@@ -6729,7 +6729,7 @@
                           <a:ea typeface="Hiragino Sans"/>
                           <a:cs typeface="Hiragino Sans"/>
                         </a:rPr>
-                        <a:t>6 万軒</a:t>
+                        <a:t>8 万軒</a:t>
                       </a:r>
                     </a:p>
                   </a:txBody>
@@ -6921,7 +6921,7 @@
                           <a:ea typeface="Hiragino Sans"/>
                           <a:cs typeface="Hiragino Sans"/>
                         </a:rPr>
-                        <a:t>92 万軒</a:t>
+                        <a:t>94 万軒</a:t>
                       </a:r>
                     </a:p>
                   </a:txBody>
@@ -6962,7 +6962,7 @@
                           <a:ea typeface="Hiragino Sans"/>
                           <a:cs typeface="Hiragino Sans"/>
                         </a:rPr>
-                        <a:t>25 万軒</a:t>
+                        <a:t>32 万軒</a:t>
                       </a:r>
                     </a:p>
                   </a:txBody>
@@ -7415,7 +7415,7 @@
                 <a:ea typeface="Hiragino Sans"/>
                 <a:cs typeface="Hiragino Sans"/>
               </a:rPr>
-              <a:t>✓  社内の融通を止めると 14 日後に 25 万軒残る</a:t>
+              <a:t>✓  社内の融通を止めると 14 日後に 32 万軒残る</a:t>
             </a:r>
           </a:p>
         </p:txBody>
@@ -7564,7 +7564,7 @@
                 <a:ea typeface="Hiragino Sans"/>
                 <a:cs typeface="Hiragino Sans"/>
               </a:rPr>
-              <a:t>✗  営業所の位置は仮置き(実在の事業所は取得中)</a:t>
+              <a:t>✗  事業所ごとの実人数は非公表で、比で配った</a:t>
             </a:r>
           </a:p>
           <a:p>

--- a/docs/slides/nankai/nankai_restoration_workforce_2026-09-14.pptx
+++ b/docs/slides/nankai/nankai_restoration_workforce_2026-09-14.pptx
@@ -505,7 +505,7 @@
           <a:lstStyle/>
           <a:p>
             <a:r>
-              <a:t>左は営業所(円の大きさが人員、色が残っている電柱修理の割合)と他社応援の車列。右上は働いている人の内訳、右中は会社別の残っている折れた電柱、右下は停電中の需要家を応援の条件で比べたもの。折れた電柱は揺れ 3,977 本、建物の全壊に巻き込まれ 60,785 本、津波 78,449 本。7 日後に働く人は 33,282 人で、地元 20,447 人、社内融通 11,179 人、他社応援 1,656 人。停電中は 716 万軒で、送電側が 463 万軒、配電が 91 万軒。営業所の円は各社が公表する事業所の位置。</a:t>
+              <a:t>左は営業所(円の大きさが人員、色が残っている電柱修理の割合)と他社応援の車列。右上は働いている人の内訳、右中は会社別の残っている折れた電柱、右下は停電中の需要家を応援の条件で比べたもの。折れた電柱は揺れ 3,977 本、建物の全壊に巻き込まれ 60,785 本、津波 78,449 本。7 日後に働く人は 33,282 人で、地元 20,447 人、社内融通 11,179 人、他社応援 1,656 人。停電中は 715 万軒で、送電側が 462 万軒、配電が 91 万軒。営業所の円は各社が公表する事業所の位置。</a:t>
             </a:r>
           </a:p>
           <a:p/>
@@ -733,7 +733,7 @@
           <a:lstStyle/>
           <a:p>
             <a:r>
-              <a:t>送電側の停電(7 日後 463 万軒)は動的カスケードの母線平均で、津波で浸水した変電所と上流の孤立が長く残る。内閣府 2025 より 4 日以降が 1 桁多い既知の問題(負の結果として記録済み)で、人員モデルでは直らない。</a:t>
+              <a:t>送電側の停電(7 日後 462 万軒)は動的カスケードの母線平均で、津波で浸水した変電所と上流の孤立が長く残る。内閣府 2025 より 4 日以降が 1 桁多い既知の問題(負の結果として記録済み)で、人員モデルでは直らない。</a:t>
             </a:r>
           </a:p>
           <a:p/>
@@ -4610,7 +4610,7 @@
                 <a:ea typeface="Hiragino Sans"/>
                 <a:cs typeface="Hiragino Sans"/>
               </a:rPr>
-              <a:t>出典｜make_restoration_workforce.py / run_v6(動的カスケード)/ 令和5年住宅・土地統計調査 第6-3表 / 内閣府 首都直下 手法 資料3 / 各社 有価証券報告書 FY2025</a:t>
+              <a:t>出典｜make_restoration_workforce.py / run_v7(動的カスケード)/ 令和5年住宅・土地統計調査 第6-3表 / 内閣府 首都直下 手法 資料3 / 各社 有価証券報告書 FY2025</a:t>
             </a:r>
           </a:p>
         </p:txBody>

--- a/docs/slides/nankai/nankai_restoration_workforce_2026-09-14.pptx
+++ b/docs/slides/nankai/nankai_restoration_workforce_2026-09-14.pptx
@@ -505,7 +505,7 @@
           <a:lstStyle/>
           <a:p>
             <a:r>
-              <a:t>左は営業所(円の大きさが人員、色が残っている電柱修理の割合)と他社応援の車列。右上は働いている人の内訳、右中は会社別の残っている折れた電柱、右下は停電中の需要家を応援の条件で比べたもの。折れた電柱は揺れ 3,977 本、建物の全壊に巻き込まれ 60,785 本、津波 78,449 本。7 日後に働く人は 33,282 人で、地元 20,447 人、社内融通 11,179 人、他社応援 1,656 人。停電中は 715 万軒で、送電側が 462 万軒、配電が 91 万軒。営業所の円は各社が公表する事業所の位置。</a:t>
+              <a:t>左は営業所(円の大きさが人員、色が残っている電柱修理の割合)と他社応援の車列。右上は働いている人の内訳、右中は会社別の残っている折れた電柱、右下は停電中の需要家を応援の条件で比べたもの。折れた電柱は揺れ 3,977 本、建物の全壊に巻き込まれ 60,785 本、津波 78,449 本。7 日後に働く人は 33,282 人で、地元 20,447 人、社内融通 11,179 人、他社応援 1,656 人。停電中は 523 万軒で、送電側 256 万軒、配電だけ 48 万軒、津波で全壊相当(復旧対象外)219 万軒。営業所の円は各社が公表する事業所の位置。</a:t>
             </a:r>
           </a:p>
           <a:p/>
@@ -733,7 +733,7 @@
           <a:lstStyle/>
           <a:p>
             <a:r>
-              <a:t>送電側の停電(7 日後 462 万軒)は動的カスケードの母線平均で、津波で浸水した変電所と上流の孤立が長く残る。内閣府 2025 より 4 日以降が 1 桁多い既知の問題(負の結果として記録済み)で、人員モデルでは直らない。</a:t>
+              <a:t>送電側の停電(7 日後 256 万軒)は動的カスケードの母線平均で、津波で浸水した変電所と上流の孤立が長く残る。内閣府 2025 より 4 日以降が 1 桁多い既知の問題(負の結果として記録済み)で、人員モデルでは直らない。</a:t>
             </a:r>
           </a:p>
           <a:p/>
@@ -7618,7 +7618,7 @@
                 <a:ea typeface="Hiragino Sans"/>
                 <a:cs typeface="Hiragino Sans"/>
               </a:rPr>
-              <a:t>✗  7 日後の停電の 6 割強は送電側で、別の課題</a:t>
+              <a:t>✗  7 日後の停電の半分は送電側で、別の課題</a:t>
             </a:r>
           </a:p>
         </p:txBody>
